--- a/汇报-最终版.pptx
+++ b/汇报-最终版.pptx
@@ -1830,17 +1830,6 @@
                 <a:cs typeface="微软雅黑" panose="020B0503020204020204" charset="-122"/>
               </a:defRPr>
             </a:pPr>
-            <a:r>
-              <a:rPr sz="1950" b="0">
-                <a:solidFill>
-                  <a:srgbClr val="000000"/>
-                </a:solidFill>
-                <a:latin typeface="微软雅黑" panose="020B0503020204020204" charset="-122"/>
-                <a:ea typeface="微软雅黑" panose="020B0503020204020204" charset="-122"/>
-                <a:cs typeface="微软雅黑" panose="020B0503020204020204" charset="-122"/>
-              </a:rPr>
-              <a:t>从正则表达式到 NFA、DFA、最小化 DFA 的完整实现，并完成测试、可视化、性能基准和现场演示脚本。</a:t>
-            </a:r>
             <a:endParaRPr sz="1950" b="0">
               <a:solidFill>
                 <a:srgbClr val="000000"/>
@@ -2329,7 +2318,7 @@
                 <a:ea typeface="微软雅黑" panose="020B0503020204020204" charset="-122"/>
                 <a:cs typeface="微软雅黑" panose="020B0503020204020204" charset="-122"/>
               </a:rPr>
-              <a:t>演示脚本把主要功能串成固定顺序，降低现场手动输入出错的风险。</a:t>
+              <a:t>演示脚本把主要功能串成固定顺序。</a:t>
             </a:r>
             <a:endParaRPr sz="1575" b="0">
               <a:solidFill>
@@ -3183,6 +3172,31 @@
               <a:ea typeface="微软雅黑" panose="020B0503020204020204" charset="-122"/>
               <a:cs typeface="微软雅黑" panose="020B0503020204020204" charset="-122"/>
             </a:endParaRPr>
+          </a:p>
+        </p:txBody>
+      </p:sp>
+      <p:sp>
+        <p:nvSpPr>
+          <p:cNvPr id="22" name="文本框 21"/>
+          <p:cNvSpPr txBox="1"/>
+          <p:nvPr/>
+        </p:nvSpPr>
+        <p:spPr>
+          <a:xfrm>
+            <a:off x="3614420" y="1217295"/>
+            <a:ext cx="4064000" cy="368300"/>
+          </a:xfrm>
+          <a:prstGeom prst="rect">
+            <a:avLst/>
+          </a:prstGeom>
+          <a:noFill/>
+        </p:spPr>
+        <p:txBody>
+          <a:bodyPr wrap="square" rtlCol="0">
+            <a:spAutoFit/>
+          </a:bodyPr>
+          <a:p>
+            <a:endParaRPr lang="zh-CN" altLang="en-US"/>
           </a:p>
         </p:txBody>
       </p:sp>
@@ -3921,17 +3935,6 @@
                 <a:cs typeface="微软雅黑" panose="020B0503020204020204" charset="-122"/>
               </a:defRPr>
             </a:pPr>
-            <a:r>
-              <a:rPr sz="1575" b="0">
-                <a:solidFill>
-                  <a:srgbClr val="555555"/>
-                </a:solidFill>
-                <a:latin typeface="微软雅黑" panose="020B0503020204020204" charset="-122"/>
-                <a:ea typeface="微软雅黑" panose="020B0503020204020204" charset="-122"/>
-                <a:cs typeface="微软雅黑" panose="020B0503020204020204" charset="-122"/>
-              </a:rPr>
-              <a:t>第十四天可以把项目状态定位为：功能完成，等待外部 Linux 工具补充正式环境报告。</a:t>
-            </a:r>
             <a:endParaRPr sz="1575" b="0">
               <a:solidFill>
                 <a:srgbClr val="555555"/>
@@ -4868,71 +4871,11 @@
                 <a:ea typeface="微软雅黑" panose="020B0503020204020204" charset="-122"/>
                 <a:cs typeface="微软雅黑" panose="020B0503020204020204" charset="-122"/>
               </a:rPr>
-              <a:t>成员分工依据 GitHub Desktop 提交记录整理</a:t>
+              <a:t>成员分工</a:t>
             </a:r>
             <a:endParaRPr sz="3000" b="1">
               <a:solidFill>
                 <a:srgbClr val="000000"/>
-              </a:solidFill>
-              <a:latin typeface="微软雅黑" panose="020B0503020204020204" charset="-122"/>
-              <a:ea typeface="微软雅黑" panose="020B0503020204020204" charset="-122"/>
-              <a:cs typeface="微软雅黑" panose="020B0503020204020204" charset="-122"/>
-            </a:endParaRPr>
-          </a:p>
-        </p:txBody>
-      </p:sp>
-      <p:sp>
-        <p:nvSpPr>
-          <p:cNvPr id="3" name="矩形 2"/>
-          <p:cNvSpPr>
-            <a:spLocks noGrp="1"/>
-          </p:cNvSpPr>
-          <p:nvPr/>
-        </p:nvSpPr>
-        <p:spPr>
-          <a:xfrm>
-            <a:off x="390525" y="990600"/>
-            <a:ext cx="9334500" cy="323850"/>
-          </a:xfrm>
-          <a:prstGeom prst="rect">
-            <a:avLst/>
-          </a:prstGeom>
-          <a:noFill/>
-          <a:ln w="0">
-            <a:noFill/>
-            <a:prstDash val="solid"/>
-          </a:ln>
-        </p:spPr>
-        <p:txBody>
-          <a:bodyPr anchor="t">
-            <a:normAutofit/>
-          </a:bodyPr>
-          <a:lstStyle/>
-          <a:p>
-            <a:pPr algn="l">
-              <a:defRPr sz="1500" b="0">
-                <a:solidFill>
-                  <a:srgbClr val="555555"/>
-                </a:solidFill>
-                <a:latin typeface="微软雅黑" panose="020B0503020204020204" charset="-122"/>
-                <a:ea typeface="微软雅黑" panose="020B0503020204020204" charset="-122"/>
-                <a:cs typeface="微软雅黑" panose="020B0503020204020204" charset="-122"/>
-              </a:defRPr>
-            </a:pPr>
-            <a:r>
-              <a:rPr sz="1500" b="0">
-                <a:solidFill>
-                  <a:srgbClr val="555555"/>
-                </a:solidFill>
-                <a:latin typeface="微软雅黑" panose="020B0503020204020204" charset="-122"/>
-                <a:ea typeface="微软雅黑" panose="020B0503020204020204" charset="-122"/>
-                <a:cs typeface="微软雅黑" panose="020B0503020204020204" charset="-122"/>
-              </a:rPr>
-              <a:t>结合提交作者、提交说明和变更文件归纳，两位成员的工作边界比较清晰。</a:t>
-            </a:r>
-            <a:endParaRPr sz="1500" b="0">
-              <a:solidFill>
-                <a:srgbClr val="555555"/>
               </a:solidFill>
               <a:latin typeface="微软雅黑" panose="020B0503020204020204" charset="-122"/>
               <a:ea typeface="微软雅黑" panose="020B0503020204020204" charset="-122"/>
@@ -6089,17 +6032,6 @@
                 <a:cs typeface="微软雅黑" panose="020B0503020204020204" charset="-122"/>
               </a:defRPr>
             </a:pPr>
-            <a:r>
-              <a:rPr sz="1575" b="0">
-                <a:solidFill>
-                  <a:srgbClr val="555555"/>
-                </a:solidFill>
-                <a:latin typeface="微软雅黑" panose="020B0503020204020204" charset="-122"/>
-                <a:ea typeface="微软雅黑" panose="020B0503020204020204" charset="-122"/>
-                <a:cs typeface="微软雅黑" panose="020B0503020204020204" charset="-122"/>
-              </a:rPr>
-              <a:t>先说明题目，再讲实现路径，最后用测试和演示证明它能跑。</a:t>
-            </a:r>
             <a:endParaRPr sz="1575" b="0">
               <a:solidFill>
                 <a:srgbClr val="555555"/>
